--- a/reports/云上归墅_项目演示_20260612.pptx
+++ b/reports/云上归墅_项目演示_20260612.pptx
@@ -5,19 +5,19 @@
     <p:sldMasterId id="2147483648" r:id="rId1"/>
   </p:sldMasterIdLst>
   <p:sldIdLst>
-    <p:sldId id="256" r:id="rId7"/>
-    <p:sldId id="257" r:id="rId8"/>
-    <p:sldId id="258" r:id="rId9"/>
-    <p:sldId id="259" r:id="rId10"/>
-    <p:sldId id="260" r:id="rId11"/>
-    <p:sldId id="261" r:id="rId12"/>
-    <p:sldId id="262" r:id="rId13"/>
-    <p:sldId id="263" r:id="rId14"/>
-    <p:sldId id="264" r:id="rId15"/>
-    <p:sldId id="265" r:id="rId16"/>
-    <p:sldId id="266" r:id="rId17"/>
+    <p:sldId id="256" r:id="rId2"/>
+    <p:sldId id="257" r:id="rId3"/>
+    <p:sldId id="258" r:id="rId4"/>
+    <p:sldId id="259" r:id="rId5"/>
+    <p:sldId id="260" r:id="rId6"/>
+    <p:sldId id="261" r:id="rId7"/>
+    <p:sldId id="262" r:id="rId8"/>
+    <p:sldId id="263" r:id="rId9"/>
+    <p:sldId id="264" r:id="rId10"/>
+    <p:sldId id="265" r:id="rId11"/>
+    <p:sldId id="266" r:id="rId12"/>
   </p:sldIdLst>
-  <p:sldSz cx="12188952" cy="6858000" type="screen4x3"/>
+  <p:sldSz cx="12188825" cy="6858000"/>
   <p:notesSz cx="6858000" cy="9144000"/>
   <p:defaultTextStyle>
     <a:defPPr>
@@ -114,6 +114,22 @@
       </a:defRPr>
     </a:lvl9pPr>
   </p:defaultTextStyle>
+  <p:extLst>
+    <p:ext uri="{EFAFB233-063F-42B5-8137-9DF3F51BA10A}">
+      <p15:sldGuideLst xmlns:p15="http://schemas.microsoft.com/office/powerpoint/2012/main">
+        <p15:guide id="1" orient="horz" pos="2160">
+          <p15:clr>
+            <a:srgbClr val="A4A3A4"/>
+          </p15:clr>
+        </p15:guide>
+        <p15:guide id="2" pos="2880">
+          <p15:clr>
+            <a:srgbClr val="A4A3A4"/>
+          </p15:clr>
+        </p15:guide>
+      </p15:sldGuideLst>
+    </p:ext>
+  </p:extLst>
 </p:presentation>
 </file>
 
@@ -155,10 +171,9 @@
           <a:lstStyle/>
           <a:p>
             <a:r>
-              <a:rPr lang="en-US" smtClean="0"/>
+              <a:rPr lang="en-US"/>
               <a:t>Click to edit Master title style</a:t>
             </a:r>
-            <a:endParaRPr lang="en-US"/>
           </a:p>
         </p:txBody>
       </p:sp>
@@ -274,10 +289,9 @@
           </a:lstStyle>
           <a:p>
             <a:r>
-              <a:rPr lang="en-US" smtClean="0"/>
+              <a:rPr lang="en-US"/>
               <a:t>Click to edit Master subtitle style</a:t>
             </a:r>
-            <a:endParaRPr lang="en-US"/>
           </a:p>
         </p:txBody>
       </p:sp>
@@ -298,7 +312,7 @@
           <a:p>
             <a:fld id="{5BCAD085-E8A6-8845-BD4E-CB4CCA059FC4}" type="datetimeFigureOut">
               <a:rPr lang="en-US" smtClean="0"/>
-              <a:t>1/27/13</a:t>
+              <a:t>6/12/2026</a:t>
             </a:fld>
             <a:endParaRPr lang="en-US"/>
           </a:p>
@@ -392,10 +406,9 @@
           <a:lstStyle/>
           <a:p>
             <a:r>
-              <a:rPr lang="en-US" smtClean="0"/>
+              <a:rPr lang="en-US"/>
               <a:t>Click to edit Master title style</a:t>
             </a:r>
-            <a:endParaRPr lang="en-US"/>
           </a:p>
         </p:txBody>
       </p:sp>
@@ -416,38 +429,37 @@
           <a:p>
             <a:pPr lvl="0"/>
             <a:r>
-              <a:rPr lang="en-US" smtClean="0"/>
+              <a:rPr lang="en-US"/>
               <a:t>Click to edit Master text styles</a:t>
             </a:r>
           </a:p>
           <a:p>
             <a:pPr lvl="1"/>
             <a:r>
-              <a:rPr lang="en-US" smtClean="0"/>
+              <a:rPr lang="en-US"/>
               <a:t>Second level</a:t>
             </a:r>
           </a:p>
           <a:p>
             <a:pPr lvl="2"/>
             <a:r>
-              <a:rPr lang="en-US" smtClean="0"/>
+              <a:rPr lang="en-US"/>
               <a:t>Third level</a:t>
             </a:r>
           </a:p>
           <a:p>
             <a:pPr lvl="3"/>
             <a:r>
-              <a:rPr lang="en-US" smtClean="0"/>
+              <a:rPr lang="en-US"/>
               <a:t>Fourth level</a:t>
             </a:r>
           </a:p>
           <a:p>
             <a:pPr lvl="4"/>
             <a:r>
-              <a:rPr lang="en-US" smtClean="0"/>
+              <a:rPr lang="en-US"/>
               <a:t>Fifth level</a:t>
             </a:r>
-            <a:endParaRPr lang="en-US"/>
           </a:p>
         </p:txBody>
       </p:sp>
@@ -468,7 +480,7 @@
           <a:p>
             <a:fld id="{5BCAD085-E8A6-8845-BD4E-CB4CCA059FC4}" type="datetimeFigureOut">
               <a:rPr lang="en-US" smtClean="0"/>
-              <a:t>1/27/13</a:t>
+              <a:t>6/12/2026</a:t>
             </a:fld>
             <a:endParaRPr lang="en-US"/>
           </a:p>
@@ -567,10 +579,9 @@
           <a:lstStyle/>
           <a:p>
             <a:r>
-              <a:rPr lang="en-US" smtClean="0"/>
+              <a:rPr lang="en-US"/>
               <a:t>Click to edit Master title style</a:t>
             </a:r>
-            <a:endParaRPr lang="en-US"/>
           </a:p>
         </p:txBody>
       </p:sp>
@@ -596,38 +607,37 @@
           <a:p>
             <a:pPr lvl="0"/>
             <a:r>
-              <a:rPr lang="en-US" smtClean="0"/>
+              <a:rPr lang="en-US"/>
               <a:t>Click to edit Master text styles</a:t>
             </a:r>
           </a:p>
           <a:p>
             <a:pPr lvl="1"/>
             <a:r>
-              <a:rPr lang="en-US" smtClean="0"/>
+              <a:rPr lang="en-US"/>
               <a:t>Second level</a:t>
             </a:r>
           </a:p>
           <a:p>
             <a:pPr lvl="2"/>
             <a:r>
-              <a:rPr lang="en-US" smtClean="0"/>
+              <a:rPr lang="en-US"/>
               <a:t>Third level</a:t>
             </a:r>
           </a:p>
           <a:p>
             <a:pPr lvl="3"/>
             <a:r>
-              <a:rPr lang="en-US" smtClean="0"/>
+              <a:rPr lang="en-US"/>
               <a:t>Fourth level</a:t>
             </a:r>
           </a:p>
           <a:p>
             <a:pPr lvl="4"/>
             <a:r>
-              <a:rPr lang="en-US" smtClean="0"/>
+              <a:rPr lang="en-US"/>
               <a:t>Fifth level</a:t>
             </a:r>
-            <a:endParaRPr lang="en-US"/>
           </a:p>
         </p:txBody>
       </p:sp>
@@ -648,7 +658,7 @@
           <a:p>
             <a:fld id="{5BCAD085-E8A6-8845-BD4E-CB4CCA059FC4}" type="datetimeFigureOut">
               <a:rPr lang="en-US" smtClean="0"/>
-              <a:t>1/27/13</a:t>
+              <a:t>6/12/2026</a:t>
             </a:fld>
             <a:endParaRPr lang="en-US"/>
           </a:p>
@@ -742,10 +752,9 @@
           <a:lstStyle/>
           <a:p>
             <a:r>
-              <a:rPr lang="en-US" smtClean="0"/>
+              <a:rPr lang="en-US"/>
               <a:t>Click to edit Master title style</a:t>
             </a:r>
-            <a:endParaRPr lang="en-US"/>
           </a:p>
         </p:txBody>
       </p:sp>
@@ -766,38 +775,37 @@
           <a:p>
             <a:pPr lvl="0"/>
             <a:r>
-              <a:rPr lang="en-US" smtClean="0"/>
+              <a:rPr lang="en-US"/>
               <a:t>Click to edit Master text styles</a:t>
             </a:r>
           </a:p>
           <a:p>
             <a:pPr lvl="1"/>
             <a:r>
-              <a:rPr lang="en-US" smtClean="0"/>
+              <a:rPr lang="en-US"/>
               <a:t>Second level</a:t>
             </a:r>
           </a:p>
           <a:p>
             <a:pPr lvl="2"/>
             <a:r>
-              <a:rPr lang="en-US" smtClean="0"/>
+              <a:rPr lang="en-US"/>
               <a:t>Third level</a:t>
             </a:r>
           </a:p>
           <a:p>
             <a:pPr lvl="3"/>
             <a:r>
-              <a:rPr lang="en-US" smtClean="0"/>
+              <a:rPr lang="en-US"/>
               <a:t>Fourth level</a:t>
             </a:r>
           </a:p>
           <a:p>
             <a:pPr lvl="4"/>
             <a:r>
-              <a:rPr lang="en-US" smtClean="0"/>
+              <a:rPr lang="en-US"/>
               <a:t>Fifth level</a:t>
             </a:r>
-            <a:endParaRPr lang="en-US"/>
           </a:p>
         </p:txBody>
       </p:sp>
@@ -818,7 +826,7 @@
           <a:p>
             <a:fld id="{5BCAD085-E8A6-8845-BD4E-CB4CCA059FC4}" type="datetimeFigureOut">
               <a:rPr lang="en-US" smtClean="0"/>
-              <a:t>1/27/13</a:t>
+              <a:t>6/12/2026</a:t>
             </a:fld>
             <a:endParaRPr lang="en-US"/>
           </a:p>
@@ -921,10 +929,9 @@
           </a:lstStyle>
           <a:p>
             <a:r>
-              <a:rPr lang="en-US" smtClean="0"/>
+              <a:rPr lang="en-US"/>
               <a:t>Click to edit Master title style</a:t>
             </a:r>
-            <a:endParaRPr lang="en-US"/>
           </a:p>
         </p:txBody>
       </p:sp>
@@ -1041,7 +1048,7 @@
           <a:p>
             <a:pPr lvl="0"/>
             <a:r>
-              <a:rPr lang="en-US" smtClean="0"/>
+              <a:rPr lang="en-US"/>
               <a:t>Click to edit Master text styles</a:t>
             </a:r>
           </a:p>
@@ -1064,7 +1071,7 @@
           <a:p>
             <a:fld id="{5BCAD085-E8A6-8845-BD4E-CB4CCA059FC4}" type="datetimeFigureOut">
               <a:rPr lang="en-US" smtClean="0"/>
-              <a:t>1/27/13</a:t>
+              <a:t>6/12/2026</a:t>
             </a:fld>
             <a:endParaRPr lang="en-US"/>
           </a:p>
@@ -1158,10 +1165,9 @@
           <a:lstStyle/>
           <a:p>
             <a:r>
-              <a:rPr lang="en-US" smtClean="0"/>
+              <a:rPr lang="en-US"/>
               <a:t>Click to edit Master title style</a:t>
             </a:r>
-            <a:endParaRPr lang="en-US"/>
           </a:p>
         </p:txBody>
       </p:sp>
@@ -1215,38 +1221,37 @@
           <a:p>
             <a:pPr lvl="0"/>
             <a:r>
-              <a:rPr lang="en-US" smtClean="0"/>
+              <a:rPr lang="en-US"/>
               <a:t>Click to edit Master text styles</a:t>
             </a:r>
           </a:p>
           <a:p>
             <a:pPr lvl="1"/>
             <a:r>
-              <a:rPr lang="en-US" smtClean="0"/>
+              <a:rPr lang="en-US"/>
               <a:t>Second level</a:t>
             </a:r>
           </a:p>
           <a:p>
             <a:pPr lvl="2"/>
             <a:r>
-              <a:rPr lang="en-US" smtClean="0"/>
+              <a:rPr lang="en-US"/>
               <a:t>Third level</a:t>
             </a:r>
           </a:p>
           <a:p>
             <a:pPr lvl="3"/>
             <a:r>
-              <a:rPr lang="en-US" smtClean="0"/>
+              <a:rPr lang="en-US"/>
               <a:t>Fourth level</a:t>
             </a:r>
           </a:p>
           <a:p>
             <a:pPr lvl="4"/>
             <a:r>
-              <a:rPr lang="en-US" smtClean="0"/>
+              <a:rPr lang="en-US"/>
               <a:t>Fifth level</a:t>
             </a:r>
-            <a:endParaRPr lang="en-US"/>
           </a:p>
         </p:txBody>
       </p:sp>
@@ -1300,38 +1305,37 @@
           <a:p>
             <a:pPr lvl="0"/>
             <a:r>
-              <a:rPr lang="en-US" smtClean="0"/>
+              <a:rPr lang="en-US"/>
               <a:t>Click to edit Master text styles</a:t>
             </a:r>
           </a:p>
           <a:p>
             <a:pPr lvl="1"/>
             <a:r>
-              <a:rPr lang="en-US" smtClean="0"/>
+              <a:rPr lang="en-US"/>
               <a:t>Second level</a:t>
             </a:r>
           </a:p>
           <a:p>
             <a:pPr lvl="2"/>
             <a:r>
-              <a:rPr lang="en-US" smtClean="0"/>
+              <a:rPr lang="en-US"/>
               <a:t>Third level</a:t>
             </a:r>
           </a:p>
           <a:p>
             <a:pPr lvl="3"/>
             <a:r>
-              <a:rPr lang="en-US" smtClean="0"/>
+              <a:rPr lang="en-US"/>
               <a:t>Fourth level</a:t>
             </a:r>
           </a:p>
           <a:p>
             <a:pPr lvl="4"/>
             <a:r>
-              <a:rPr lang="en-US" smtClean="0"/>
+              <a:rPr lang="en-US"/>
               <a:t>Fifth level</a:t>
             </a:r>
-            <a:endParaRPr lang="en-US"/>
           </a:p>
         </p:txBody>
       </p:sp>
@@ -1352,7 +1356,7 @@
           <a:p>
             <a:fld id="{5BCAD085-E8A6-8845-BD4E-CB4CCA059FC4}" type="datetimeFigureOut">
               <a:rPr lang="en-US" smtClean="0"/>
-              <a:t>1/27/13</a:t>
+              <a:t>6/12/2026</a:t>
             </a:fld>
             <a:endParaRPr lang="en-US"/>
           </a:p>
@@ -1450,10 +1454,9 @@
           </a:lstStyle>
           <a:p>
             <a:r>
-              <a:rPr lang="en-US" smtClean="0"/>
+              <a:rPr lang="en-US"/>
               <a:t>Click to edit Master title style</a:t>
             </a:r>
-            <a:endParaRPr lang="en-US"/>
           </a:p>
         </p:txBody>
       </p:sp>
@@ -1516,7 +1519,7 @@
           <a:p>
             <a:pPr lvl="0"/>
             <a:r>
-              <a:rPr lang="en-US" smtClean="0"/>
+              <a:rPr lang="en-US"/>
               <a:t>Click to edit Master text styles</a:t>
             </a:r>
           </a:p>
@@ -1572,38 +1575,37 @@
           <a:p>
             <a:pPr lvl="0"/>
             <a:r>
-              <a:rPr lang="en-US" smtClean="0"/>
+              <a:rPr lang="en-US"/>
               <a:t>Click to edit Master text styles</a:t>
             </a:r>
           </a:p>
           <a:p>
             <a:pPr lvl="1"/>
             <a:r>
-              <a:rPr lang="en-US" smtClean="0"/>
+              <a:rPr lang="en-US"/>
               <a:t>Second level</a:t>
             </a:r>
           </a:p>
           <a:p>
             <a:pPr lvl="2"/>
             <a:r>
-              <a:rPr lang="en-US" smtClean="0"/>
+              <a:rPr lang="en-US"/>
               <a:t>Third level</a:t>
             </a:r>
           </a:p>
           <a:p>
             <a:pPr lvl="3"/>
             <a:r>
-              <a:rPr lang="en-US" smtClean="0"/>
+              <a:rPr lang="en-US"/>
               <a:t>Fourth level</a:t>
             </a:r>
           </a:p>
           <a:p>
             <a:pPr lvl="4"/>
             <a:r>
-              <a:rPr lang="en-US" smtClean="0"/>
+              <a:rPr lang="en-US"/>
               <a:t>Fifth level</a:t>
             </a:r>
-            <a:endParaRPr lang="en-US"/>
           </a:p>
         </p:txBody>
       </p:sp>
@@ -1666,7 +1668,7 @@
           <a:p>
             <a:pPr lvl="0"/>
             <a:r>
-              <a:rPr lang="en-US" smtClean="0"/>
+              <a:rPr lang="en-US"/>
               <a:t>Click to edit Master text styles</a:t>
             </a:r>
           </a:p>
@@ -1722,38 +1724,37 @@
           <a:p>
             <a:pPr lvl="0"/>
             <a:r>
-              <a:rPr lang="en-US" smtClean="0"/>
+              <a:rPr lang="en-US"/>
               <a:t>Click to edit Master text styles</a:t>
             </a:r>
           </a:p>
           <a:p>
             <a:pPr lvl="1"/>
             <a:r>
-              <a:rPr lang="en-US" smtClean="0"/>
+              <a:rPr lang="en-US"/>
               <a:t>Second level</a:t>
             </a:r>
           </a:p>
           <a:p>
             <a:pPr lvl="2"/>
             <a:r>
-              <a:rPr lang="en-US" smtClean="0"/>
+              <a:rPr lang="en-US"/>
               <a:t>Third level</a:t>
             </a:r>
           </a:p>
           <a:p>
             <a:pPr lvl="3"/>
             <a:r>
-              <a:rPr lang="en-US" smtClean="0"/>
+              <a:rPr lang="en-US"/>
               <a:t>Fourth level</a:t>
             </a:r>
           </a:p>
           <a:p>
             <a:pPr lvl="4"/>
             <a:r>
-              <a:rPr lang="en-US" smtClean="0"/>
+              <a:rPr lang="en-US"/>
               <a:t>Fifth level</a:t>
             </a:r>
-            <a:endParaRPr lang="en-US"/>
           </a:p>
         </p:txBody>
       </p:sp>
@@ -1774,7 +1775,7 @@
           <a:p>
             <a:fld id="{5BCAD085-E8A6-8845-BD4E-CB4CCA059FC4}" type="datetimeFigureOut">
               <a:rPr lang="en-US" smtClean="0"/>
-              <a:t>1/27/13</a:t>
+              <a:t>6/12/2026</a:t>
             </a:fld>
             <a:endParaRPr lang="en-US"/>
           </a:p>
@@ -1868,10 +1869,9 @@
           <a:lstStyle/>
           <a:p>
             <a:r>
-              <a:rPr lang="en-US" smtClean="0"/>
+              <a:rPr lang="en-US"/>
               <a:t>Click to edit Master title style</a:t>
             </a:r>
-            <a:endParaRPr lang="en-US"/>
           </a:p>
         </p:txBody>
       </p:sp>
@@ -1892,7 +1892,7 @@
           <a:p>
             <a:fld id="{5BCAD085-E8A6-8845-BD4E-CB4CCA059FC4}" type="datetimeFigureOut">
               <a:rPr lang="en-US" smtClean="0"/>
-              <a:t>1/27/13</a:t>
+              <a:t>6/12/2026</a:t>
             </a:fld>
             <a:endParaRPr lang="en-US"/>
           </a:p>
@@ -1987,7 +1987,7 @@
           <a:p>
             <a:fld id="{5BCAD085-E8A6-8845-BD4E-CB4CCA059FC4}" type="datetimeFigureOut">
               <a:rPr lang="en-US" smtClean="0"/>
-              <a:t>1/27/13</a:t>
+              <a:t>6/12/2026</a:t>
             </a:fld>
             <a:endParaRPr lang="en-US"/>
           </a:p>
@@ -2090,10 +2090,9 @@
           </a:lstStyle>
           <a:p>
             <a:r>
-              <a:rPr lang="en-US" smtClean="0"/>
+              <a:rPr lang="en-US"/>
               <a:t>Click to edit Master title style</a:t>
             </a:r>
-            <a:endParaRPr lang="en-US"/>
           </a:p>
         </p:txBody>
       </p:sp>
@@ -2147,38 +2146,37 @@
           <a:p>
             <a:pPr lvl="0"/>
             <a:r>
-              <a:rPr lang="en-US" smtClean="0"/>
+              <a:rPr lang="en-US"/>
               <a:t>Click to edit Master text styles</a:t>
             </a:r>
           </a:p>
           <a:p>
             <a:pPr lvl="1"/>
             <a:r>
-              <a:rPr lang="en-US" smtClean="0"/>
+              <a:rPr lang="en-US"/>
               <a:t>Second level</a:t>
             </a:r>
           </a:p>
           <a:p>
             <a:pPr lvl="2"/>
             <a:r>
-              <a:rPr lang="en-US" smtClean="0"/>
+              <a:rPr lang="en-US"/>
               <a:t>Third level</a:t>
             </a:r>
           </a:p>
           <a:p>
             <a:pPr lvl="3"/>
             <a:r>
-              <a:rPr lang="en-US" smtClean="0"/>
+              <a:rPr lang="en-US"/>
               <a:t>Fourth level</a:t>
             </a:r>
           </a:p>
           <a:p>
             <a:pPr lvl="4"/>
             <a:r>
-              <a:rPr lang="en-US" smtClean="0"/>
+              <a:rPr lang="en-US"/>
               <a:t>Fifth level</a:t>
             </a:r>
-            <a:endParaRPr lang="en-US"/>
           </a:p>
         </p:txBody>
       </p:sp>
@@ -2241,7 +2239,7 @@
           <a:p>
             <a:pPr lvl="0"/>
             <a:r>
-              <a:rPr lang="en-US" smtClean="0"/>
+              <a:rPr lang="en-US"/>
               <a:t>Click to edit Master text styles</a:t>
             </a:r>
           </a:p>
@@ -2264,7 +2262,7 @@
           <a:p>
             <a:fld id="{5BCAD085-E8A6-8845-BD4E-CB4CCA059FC4}" type="datetimeFigureOut">
               <a:rPr lang="en-US" smtClean="0"/>
-              <a:t>1/27/13</a:t>
+              <a:t>6/12/2026</a:t>
             </a:fld>
             <a:endParaRPr lang="en-US"/>
           </a:p>
@@ -2367,10 +2365,9 @@
           </a:lstStyle>
           <a:p>
             <a:r>
-              <a:rPr lang="en-US" smtClean="0"/>
+              <a:rPr lang="en-US"/>
               <a:t>Click to edit Master title style</a:t>
             </a:r>
-            <a:endParaRPr lang="en-US"/>
           </a:p>
         </p:txBody>
       </p:sp>
@@ -2494,7 +2491,7 @@
           <a:p>
             <a:pPr lvl="0"/>
             <a:r>
-              <a:rPr lang="en-US" smtClean="0"/>
+              <a:rPr lang="en-US"/>
               <a:t>Click to edit Master text styles</a:t>
             </a:r>
           </a:p>
@@ -2517,7 +2514,7 @@
           <a:p>
             <a:fld id="{5BCAD085-E8A6-8845-BD4E-CB4CCA059FC4}" type="datetimeFigureOut">
               <a:rPr lang="en-US" smtClean="0"/>
-              <a:t>1/27/13</a:t>
+              <a:t>6/12/2026</a:t>
             </a:fld>
             <a:endParaRPr lang="en-US"/>
           </a:p>
@@ -2626,10 +2623,9 @@
           <a:lstStyle/>
           <a:p>
             <a:r>
-              <a:rPr lang="en-US" smtClean="0"/>
+              <a:rPr lang="en-US"/>
               <a:t>Click to edit Master title style</a:t>
             </a:r>
-            <a:endParaRPr lang="en-US"/>
           </a:p>
         </p:txBody>
       </p:sp>
@@ -2660,38 +2656,37 @@
           <a:p>
             <a:pPr lvl="0"/>
             <a:r>
-              <a:rPr lang="en-US" smtClean="0"/>
+              <a:rPr lang="en-US"/>
               <a:t>Click to edit Master text styles</a:t>
             </a:r>
           </a:p>
           <a:p>
             <a:pPr lvl="1"/>
             <a:r>
-              <a:rPr lang="en-US" smtClean="0"/>
+              <a:rPr lang="en-US"/>
               <a:t>Second level</a:t>
             </a:r>
           </a:p>
           <a:p>
             <a:pPr lvl="2"/>
             <a:r>
-              <a:rPr lang="en-US" smtClean="0"/>
+              <a:rPr lang="en-US"/>
               <a:t>Third level</a:t>
             </a:r>
           </a:p>
           <a:p>
             <a:pPr lvl="3"/>
             <a:r>
-              <a:rPr lang="en-US" smtClean="0"/>
+              <a:rPr lang="en-US"/>
               <a:t>Fourth level</a:t>
             </a:r>
           </a:p>
           <a:p>
             <a:pPr lvl="4"/>
             <a:r>
-              <a:rPr lang="en-US" smtClean="0"/>
+              <a:rPr lang="en-US"/>
               <a:t>Fifth level</a:t>
             </a:r>
-            <a:endParaRPr lang="en-US"/>
           </a:p>
         </p:txBody>
       </p:sp>
@@ -2730,7 +2725,7 @@
           <a:p>
             <a:fld id="{5BCAD085-E8A6-8845-BD4E-CB4CCA059FC4}" type="datetimeFigureOut">
               <a:rPr lang="en-US" smtClean="0"/>
-              <a:t>1/27/13</a:t>
+              <a:t>6/12/2026</a:t>
             </a:fld>
             <a:endParaRPr lang="en-US"/>
           </a:p>
@@ -3089,7 +3084,7 @@
 </file>
 
 <file path=ppt/slides/slide1.xml><?xml version="1.0" encoding="utf-8"?>
-<p:sld xmlns:a="http://schemas.openxmlformats.org/drawingml/2006/main" xmlns:p="http://schemas.openxmlformats.org/presentationml/2006/main" xmlns:r="http://schemas.openxmlformats.org/officeDocument/2006/relationships">
+<p:sld xmlns:a="http://schemas.openxmlformats.org/drawingml/2006/main" xmlns:r="http://schemas.openxmlformats.org/officeDocument/2006/relationships" xmlns:p="http://schemas.openxmlformats.org/presentationml/2006/main">
   <p:cSld>
     <p:bg>
       <p:bgPr>
@@ -3105,7 +3100,14 @@
         <p:cNvGrpSpPr/>
         <p:nvPr/>
       </p:nvGrpSpPr>
-      <p:grpSpPr/>
+      <p:grpSpPr>
+        <a:xfrm>
+          <a:off x="0" y="0"/>
+          <a:ext cx="0" cy="0"/>
+          <a:chOff x="0" y="0"/>
+          <a:chExt cx="0" cy="0"/>
+        </a:xfrm>
+      </p:grpSpPr>
       <p:sp>
         <p:nvSpPr>
           <p:cNvPr id="2" name="TextBox 1"/>
@@ -3259,7 +3261,7 @@
 </file>
 
 <file path=ppt/slides/slide10.xml><?xml version="1.0" encoding="utf-8"?>
-<p:sld xmlns:a="http://schemas.openxmlformats.org/drawingml/2006/main" xmlns:p="http://schemas.openxmlformats.org/presentationml/2006/main" xmlns:r="http://schemas.openxmlformats.org/officeDocument/2006/relationships">
+<p:sld xmlns:a="http://schemas.openxmlformats.org/drawingml/2006/main" xmlns:r="http://schemas.openxmlformats.org/officeDocument/2006/relationships" xmlns:p="http://schemas.openxmlformats.org/presentationml/2006/main">
   <p:cSld>
     <p:bg>
       <p:bgPr>
@@ -3275,7 +3277,14 @@
         <p:cNvGrpSpPr/>
         <p:nvPr/>
       </p:nvGrpSpPr>
-      <p:grpSpPr/>
+      <p:grpSpPr>
+        <a:xfrm>
+          <a:off x="0" y="0"/>
+          <a:ext cx="0" cy="0"/>
+          <a:chOff x="0" y="0"/>
+          <a:chExt cx="0" cy="0"/>
+        </a:xfrm>
+      </p:grpSpPr>
       <p:sp>
         <p:nvSpPr>
           <p:cNvPr id="2" name="TextBox 1"/>
@@ -3381,7 +3390,7 @@
 </file>
 
 <file path=ppt/slides/slide11.xml><?xml version="1.0" encoding="utf-8"?>
-<p:sld xmlns:a="http://schemas.openxmlformats.org/drawingml/2006/main" xmlns:p="http://schemas.openxmlformats.org/presentationml/2006/main" xmlns:r="http://schemas.openxmlformats.org/officeDocument/2006/relationships">
+<p:sld xmlns:a="http://schemas.openxmlformats.org/drawingml/2006/main" xmlns:r="http://schemas.openxmlformats.org/officeDocument/2006/relationships" xmlns:p="http://schemas.openxmlformats.org/presentationml/2006/main">
   <p:cSld>
     <p:bg>
       <p:bgPr>
@@ -3397,7 +3406,14 @@
         <p:cNvGrpSpPr/>
         <p:nvPr/>
       </p:nvGrpSpPr>
-      <p:grpSpPr/>
+      <p:grpSpPr>
+        <a:xfrm>
+          <a:off x="0" y="0"/>
+          <a:ext cx="0" cy="0"/>
+          <a:chOff x="0" y="0"/>
+          <a:chExt cx="0" cy="0"/>
+        </a:xfrm>
+      </p:grpSpPr>
       <p:sp>
         <p:nvSpPr>
           <p:cNvPr id="2" name="TextBox 1"/>
@@ -3551,7 +3567,7 @@
 </file>
 
 <file path=ppt/slides/slide2.xml><?xml version="1.0" encoding="utf-8"?>
-<p:sld xmlns:a="http://schemas.openxmlformats.org/drawingml/2006/main" xmlns:p="http://schemas.openxmlformats.org/presentationml/2006/main" xmlns:r="http://schemas.openxmlformats.org/officeDocument/2006/relationships">
+<p:sld xmlns:a="http://schemas.openxmlformats.org/drawingml/2006/main" xmlns:r="http://schemas.openxmlformats.org/officeDocument/2006/relationships" xmlns:p="http://schemas.openxmlformats.org/presentationml/2006/main">
   <p:cSld>
     <p:bg>
       <p:bgPr>
@@ -3567,7 +3583,14 @@
         <p:cNvGrpSpPr/>
         <p:nvPr/>
       </p:nvGrpSpPr>
-      <p:grpSpPr/>
+      <p:grpSpPr>
+        <a:xfrm>
+          <a:off x="0" y="0"/>
+          <a:ext cx="0" cy="0"/>
+          <a:chOff x="0" y="0"/>
+          <a:chExt cx="0" cy="0"/>
+        </a:xfrm>
+      </p:grpSpPr>
       <p:pic>
         <p:nvPicPr>
           <p:cNvPr id="2" name="Picture 1" descr="第二面左半边.png"/>
@@ -3668,6 +3691,7 @@
           <a:lstStyle/>
           <a:p>
             <a:pPr algn="ctr"/>
+            <a:endParaRPr/>
           </a:p>
         </p:txBody>
       </p:sp>
@@ -3680,7 +3704,7 @@
         <p:spPr>
           <a:xfrm>
             <a:off x="5486400" y="1920240"/>
-            <a:ext cx="5943600" cy="4389120"/>
+            <a:ext cx="5943600" cy="3539430"/>
           </a:xfrm>
           <a:prstGeom prst="rect">
             <a:avLst/>
@@ -3702,53 +3726,157 @@
               </a:defRPr>
             </a:pPr>
             <a:r>
-              <a:t>🏔️  海拔千米的U型三层小楼</a:t>
-            </a:r>
-            <a:br/>
-            <a:r>
-              <a:t>      推窗即漫山云海</a:t>
-            </a:r>
-            <a:br/>
-            <a:br/>
-            <a:r>
-              <a:t>☕  一楼「三山二水咖啡」自营精品咖啡馆</a:t>
-            </a:r>
-            <a:br/>
-            <a:r>
-              <a:t>      主理人麦姐亲自打理</a:t>
-            </a:r>
-            <a:br/>
-            <a:r>
-              <a:t>      自种庐山云雾茶，自酿美酒</a:t>
-            </a:r>
-            <a:br/>
-            <a:br/>
-            <a:r>
+              <a:rPr dirty="0"/>
+              <a:t>🏔️  </a:t>
+            </a:r>
+            <a:r>
+              <a:rPr dirty="0" err="1"/>
+              <a:t>海拔千米的U型三层小楼</a:t>
+            </a:r>
+            <a:br>
+              <a:rPr dirty="0"/>
+            </a:br>
+            <a:r>
+              <a:rPr dirty="0"/>
+              <a:t>      </a:t>
+            </a:r>
+            <a:r>
+              <a:rPr dirty="0" err="1"/>
+              <a:t>推窗即漫山云海</a:t>
+            </a:r>
+            <a:br>
+              <a:rPr dirty="0"/>
+            </a:br>
+            <a:br>
+              <a:rPr dirty="0"/>
+            </a:br>
+            <a:r>
+              <a:rPr dirty="0"/>
+              <a:t>☕  </a:t>
+            </a:r>
+            <a:r>
+              <a:rPr dirty="0" err="1"/>
+              <a:t>一楼「三山二水咖啡」自营精品咖啡馆</a:t>
+            </a:r>
+            <a:br>
+              <a:rPr dirty="0"/>
+            </a:br>
+            <a:r>
+              <a:rPr dirty="0"/>
+              <a:t>      </a:t>
+            </a:r>
+            <a:r>
+              <a:rPr dirty="0" err="1"/>
+              <a:t>自种庐山云雾茶，自酿美酒</a:t>
+            </a:r>
+            <a:br>
+              <a:rPr dirty="0"/>
+            </a:br>
+            <a:br>
+              <a:rPr dirty="0"/>
+            </a:br>
+            <a:r>
+              <a:rPr dirty="0"/>
               <a:t>🛏️  11间客房 · 8种精品房型</a:t>
             </a:r>
-            <a:br/>
-            <a:r>
-              <a:t>      ¥388起 · 山景/露台/云海/竹林</a:t>
-            </a:r>
-            <a:br/>
-            <a:br/>
-            <a:r>
-              <a:t>🐾  宠物友好 · 免费携带猫狗入住</a:t>
-            </a:r>
-            <a:br/>
-            <a:br/>
-            <a:r>
-              <a:t>🅿️  免费私家停车场</a:t>
-            </a:r>
-            <a:br/>
-            <a:br/>
-            <a:r>
+            <a:br>
+              <a:rPr dirty="0"/>
+            </a:br>
+            <a:r>
+              <a:rPr dirty="0"/>
+              <a:t>      ¥388起 · </a:t>
+            </a:r>
+            <a:r>
+              <a:rPr dirty="0" err="1"/>
+              <a:t>山景</a:t>
+            </a:r>
+            <a:r>
+              <a:rPr dirty="0"/>
+              <a:t>/</a:t>
+            </a:r>
+            <a:r>
+              <a:rPr dirty="0" err="1"/>
+              <a:t>露台</a:t>
+            </a:r>
+            <a:r>
+              <a:rPr dirty="0"/>
+              <a:t>/</a:t>
+            </a:r>
+            <a:r>
+              <a:rPr dirty="0" err="1"/>
+              <a:t>云海</a:t>
+            </a:r>
+            <a:r>
+              <a:rPr dirty="0"/>
+              <a:t>/</a:t>
+            </a:r>
+            <a:r>
+              <a:rPr dirty="0" err="1"/>
+              <a:t>竹林</a:t>
+            </a:r>
+            <a:br>
+              <a:rPr dirty="0"/>
+            </a:br>
+            <a:br>
+              <a:rPr dirty="0"/>
+            </a:br>
+            <a:r>
+              <a:rPr dirty="0"/>
+              <a:t>🐾  </a:t>
+            </a:r>
+            <a:r>
+              <a:rPr dirty="0" err="1"/>
+              <a:t>宠物友好</a:t>
+            </a:r>
+            <a:r>
+              <a:rPr dirty="0"/>
+              <a:t> · </a:t>
+            </a:r>
+            <a:r>
+              <a:rPr dirty="0" err="1"/>
+              <a:t>免费携带猫狗入住</a:t>
+            </a:r>
+            <a:br>
+              <a:rPr dirty="0"/>
+            </a:br>
+            <a:br>
+              <a:rPr dirty="0"/>
+            </a:br>
+            <a:r>
+              <a:rPr dirty="0"/>
+              <a:t>🅿️  </a:t>
+            </a:r>
+            <a:r>
+              <a:rPr dirty="0" err="1"/>
+              <a:t>免费私家停车场</a:t>
+            </a:r>
+            <a:br>
+              <a:rPr dirty="0"/>
+            </a:br>
+            <a:br>
+              <a:rPr dirty="0"/>
+            </a:br>
+            <a:r>
+              <a:rPr dirty="0"/>
               <a:t>🚡  索道上站步行5分钟</a:t>
             </a:r>
-            <a:br/>
-            <a:br/>
-            <a:r>
-              <a:t>⭐  携程 4.7分 · 85条真实评价</a:t>
+            <a:br>
+              <a:rPr dirty="0"/>
+            </a:br>
+            <a:br>
+              <a:rPr dirty="0"/>
+            </a:br>
+            <a:r>
+              <a:rPr dirty="0"/>
+              <a:t>⭐  </a:t>
+            </a:r>
+            <a:r>
+              <a:rPr dirty="0" err="1"/>
+              <a:t>携程</a:t>
+            </a:r>
+            <a:r>
+              <a:rPr dirty="0"/>
+              <a:t> 4.7分 · 85条真实评价</a:t>
             </a:r>
           </a:p>
         </p:txBody>
@@ -3762,7 +3890,7 @@
 </file>
 
 <file path=ppt/slides/slide3.xml><?xml version="1.0" encoding="utf-8"?>
-<p:sld xmlns:a="http://schemas.openxmlformats.org/drawingml/2006/main" xmlns:p="http://schemas.openxmlformats.org/presentationml/2006/main" xmlns:r="http://schemas.openxmlformats.org/officeDocument/2006/relationships">
+<p:sld xmlns:a="http://schemas.openxmlformats.org/drawingml/2006/main" xmlns:r="http://schemas.openxmlformats.org/officeDocument/2006/relationships" xmlns:p="http://schemas.openxmlformats.org/presentationml/2006/main">
   <p:cSld>
     <p:bg>
       <p:bgPr>
@@ -3778,7 +3906,14 @@
         <p:cNvGrpSpPr/>
         <p:nvPr/>
       </p:nvGrpSpPr>
-      <p:grpSpPr/>
+      <p:grpSpPr>
+        <a:xfrm>
+          <a:off x="0" y="0"/>
+          <a:ext cx="0" cy="0"/>
+          <a:chOff x="0" y="0"/>
+          <a:chExt cx="0" cy="0"/>
+        </a:xfrm>
+      </p:grpSpPr>
       <p:sp>
         <p:nvSpPr>
           <p:cNvPr id="2" name="TextBox 1"/>
@@ -3855,6 +3990,7 @@
           <a:lstStyle/>
           <a:p>
             <a:pPr algn="ctr"/>
+            <a:endParaRPr/>
           </a:p>
         </p:txBody>
       </p:sp>
@@ -3900,6 +4036,7 @@
           <a:lstStyle/>
           <a:p>
             <a:pPr algn="ctr"/>
+            <a:endParaRPr/>
           </a:p>
         </p:txBody>
       </p:sp>
@@ -4065,6 +4202,7 @@
           <a:lstStyle/>
           <a:p>
             <a:pPr algn="ctr"/>
+            <a:endParaRPr/>
           </a:p>
         </p:txBody>
       </p:sp>
@@ -4230,6 +4368,7 @@
           <a:lstStyle/>
           <a:p>
             <a:pPr algn="ctr"/>
+            <a:endParaRPr/>
           </a:p>
         </p:txBody>
       </p:sp>
@@ -4398,7 +4537,7 @@
 </file>
 
 <file path=ppt/slides/slide4.xml><?xml version="1.0" encoding="utf-8"?>
-<p:sld xmlns:a="http://schemas.openxmlformats.org/drawingml/2006/main" xmlns:p="http://schemas.openxmlformats.org/presentationml/2006/main" xmlns:r="http://schemas.openxmlformats.org/officeDocument/2006/relationships">
+<p:sld xmlns:a="http://schemas.openxmlformats.org/drawingml/2006/main" xmlns:r="http://schemas.openxmlformats.org/officeDocument/2006/relationships" xmlns:p="http://schemas.openxmlformats.org/presentationml/2006/main">
   <p:cSld>
     <p:bg>
       <p:bgPr>
@@ -4414,7 +4553,14 @@
         <p:cNvGrpSpPr/>
         <p:nvPr/>
       </p:nvGrpSpPr>
-      <p:grpSpPr/>
+      <p:grpSpPr>
+        <a:xfrm>
+          <a:off x="0" y="0"/>
+          <a:ext cx="0" cy="0"/>
+          <a:chOff x="0" y="0"/>
+          <a:chExt cx="0" cy="0"/>
+        </a:xfrm>
+      </p:grpSpPr>
       <p:sp>
         <p:nvSpPr>
           <p:cNvPr id="2" name="TextBox 1"/>
@@ -4588,7 +4734,7 @@
 </file>
 
 <file path=ppt/slides/slide5.xml><?xml version="1.0" encoding="utf-8"?>
-<p:sld xmlns:a="http://schemas.openxmlformats.org/drawingml/2006/main" xmlns:p="http://schemas.openxmlformats.org/presentationml/2006/main" xmlns:r="http://schemas.openxmlformats.org/officeDocument/2006/relationships">
+<p:sld xmlns:a="http://schemas.openxmlformats.org/drawingml/2006/main" xmlns:r="http://schemas.openxmlformats.org/officeDocument/2006/relationships" xmlns:p="http://schemas.openxmlformats.org/presentationml/2006/main">
   <p:cSld>
     <p:bg>
       <p:bgPr>
@@ -4604,7 +4750,14 @@
         <p:cNvGrpSpPr/>
         <p:nvPr/>
       </p:nvGrpSpPr>
-      <p:grpSpPr/>
+      <p:grpSpPr>
+        <a:xfrm>
+          <a:off x="0" y="0"/>
+          <a:ext cx="0" cy="0"/>
+          <a:chOff x="0" y="0"/>
+          <a:chExt cx="0" cy="0"/>
+        </a:xfrm>
+      </p:grpSpPr>
       <p:pic>
         <p:nvPicPr>
           <p:cNvPr id="2" name="Picture 1" descr="第五面右半边.png"/>
@@ -4729,6 +4882,7 @@
           <a:lstStyle/>
           <a:p>
             <a:pPr algn="ctr"/>
+            <a:endParaRPr/>
           </a:p>
         </p:txBody>
       </p:sp>
@@ -4811,7 +4965,7 @@
 </file>
 
 <file path=ppt/slides/slide6.xml><?xml version="1.0" encoding="utf-8"?>
-<p:sld xmlns:a="http://schemas.openxmlformats.org/drawingml/2006/main" xmlns:p="http://schemas.openxmlformats.org/presentationml/2006/main" xmlns:r="http://schemas.openxmlformats.org/officeDocument/2006/relationships">
+<p:sld xmlns:a="http://schemas.openxmlformats.org/drawingml/2006/main" xmlns:r="http://schemas.openxmlformats.org/officeDocument/2006/relationships" xmlns:p="http://schemas.openxmlformats.org/presentationml/2006/main">
   <p:cSld>
     <p:bg>
       <p:bgPr>
@@ -4827,7 +4981,14 @@
         <p:cNvGrpSpPr/>
         <p:nvPr/>
       </p:nvGrpSpPr>
-      <p:grpSpPr/>
+      <p:grpSpPr>
+        <a:xfrm>
+          <a:off x="0" y="0"/>
+          <a:ext cx="0" cy="0"/>
+          <a:chOff x="0" y="0"/>
+          <a:chExt cx="0" cy="0"/>
+        </a:xfrm>
+      </p:grpSpPr>
       <p:pic>
         <p:nvPicPr>
           <p:cNvPr id="2" name="Picture 1" descr="第六面右边.png"/>
@@ -4928,6 +5089,7 @@
           <a:lstStyle/>
           <a:p>
             <a:pPr algn="ctr"/>
+            <a:endParaRPr/>
           </a:p>
         </p:txBody>
       </p:sp>
@@ -5021,7 +5183,7 @@
 </file>
 
 <file path=ppt/slides/slide7.xml><?xml version="1.0" encoding="utf-8"?>
-<p:sld xmlns:a="http://schemas.openxmlformats.org/drawingml/2006/main" xmlns:p="http://schemas.openxmlformats.org/presentationml/2006/main" xmlns:r="http://schemas.openxmlformats.org/officeDocument/2006/relationships">
+<p:sld xmlns:a="http://schemas.openxmlformats.org/drawingml/2006/main" xmlns:r="http://schemas.openxmlformats.org/officeDocument/2006/relationships" xmlns:p="http://schemas.openxmlformats.org/presentationml/2006/main">
   <p:cSld>
     <p:bg>
       <p:bgPr>
@@ -5037,7 +5199,14 @@
         <p:cNvGrpSpPr/>
         <p:nvPr/>
       </p:nvGrpSpPr>
-      <p:grpSpPr/>
+      <p:grpSpPr>
+        <a:xfrm>
+          <a:off x="0" y="0"/>
+          <a:ext cx="0" cy="0"/>
+          <a:chOff x="0" y="0"/>
+          <a:chExt cx="0" cy="0"/>
+        </a:xfrm>
+      </p:grpSpPr>
       <p:pic>
         <p:nvPicPr>
           <p:cNvPr id="2" name="Picture 1" descr="第七面右边.png"/>
@@ -5138,6 +5307,7 @@
           <a:lstStyle/>
           <a:p>
             <a:pPr algn="ctr"/>
+            <a:endParaRPr/>
           </a:p>
         </p:txBody>
       </p:sp>
@@ -5218,7 +5388,7 @@
 </file>
 
 <file path=ppt/slides/slide8.xml><?xml version="1.0" encoding="utf-8"?>
-<p:sld xmlns:a="http://schemas.openxmlformats.org/drawingml/2006/main" xmlns:p="http://schemas.openxmlformats.org/presentationml/2006/main" xmlns:r="http://schemas.openxmlformats.org/officeDocument/2006/relationships">
+<p:sld xmlns:a="http://schemas.openxmlformats.org/drawingml/2006/main" xmlns:r="http://schemas.openxmlformats.org/officeDocument/2006/relationships" xmlns:p="http://schemas.openxmlformats.org/presentationml/2006/main">
   <p:cSld>
     <p:bg>
       <p:bgPr>
@@ -5234,7 +5404,14 @@
         <p:cNvGrpSpPr/>
         <p:nvPr/>
       </p:nvGrpSpPr>
-      <p:grpSpPr/>
+      <p:grpSpPr>
+        <a:xfrm>
+          <a:off x="0" y="0"/>
+          <a:ext cx="0" cy="0"/>
+          <a:chOff x="0" y="0"/>
+          <a:chExt cx="0" cy="0"/>
+        </a:xfrm>
+      </p:grpSpPr>
       <p:pic>
         <p:nvPicPr>
           <p:cNvPr id="2" name="Picture 1" descr="第八面右边.png"/>
@@ -5335,6 +5512,7 @@
           <a:lstStyle/>
           <a:p>
             <a:pPr algn="ctr"/>
+            <a:endParaRPr/>
           </a:p>
         </p:txBody>
       </p:sp>
@@ -5423,7 +5601,7 @@
 </file>
 
 <file path=ppt/slides/slide9.xml><?xml version="1.0" encoding="utf-8"?>
-<p:sld xmlns:a="http://schemas.openxmlformats.org/drawingml/2006/main" xmlns:p="http://schemas.openxmlformats.org/presentationml/2006/main" xmlns:r="http://schemas.openxmlformats.org/officeDocument/2006/relationships">
+<p:sld xmlns:a="http://schemas.openxmlformats.org/drawingml/2006/main" xmlns:r="http://schemas.openxmlformats.org/officeDocument/2006/relationships" xmlns:p="http://schemas.openxmlformats.org/presentationml/2006/main">
   <p:cSld>
     <p:bg>
       <p:bgPr>
@@ -5439,7 +5617,14 @@
         <p:cNvGrpSpPr/>
         <p:nvPr/>
       </p:nvGrpSpPr>
-      <p:grpSpPr/>
+      <p:grpSpPr>
+        <a:xfrm>
+          <a:off x="0" y="0"/>
+          <a:ext cx="0" cy="0"/>
+          <a:chOff x="0" y="0"/>
+          <a:chExt cx="0" cy="0"/>
+        </a:xfrm>
+      </p:grpSpPr>
       <p:sp>
         <p:nvSpPr>
           <p:cNvPr id="2" name="TextBox 1"/>
@@ -5516,6 +5701,7 @@
           <a:lstStyle/>
           <a:p>
             <a:pPr algn="ctr"/>
+            <a:endParaRPr/>
           </a:p>
         </p:txBody>
       </p:sp>
